--- a/plugins/fh-preprep/skills/preprep/fixtures/fixture_R3_positive.pptx
+++ b/plugins/fh-preprep/skills/preprep/fixtures/fixture_R3_positive.pptx
@@ -64,10 +64,10 @@
         </a:solidFill>
         <a:effectLst/>
         <a:uFillTx/>
-        <a:latin typeface="카카오 큰글씨 Regular"/>
-        <a:ea typeface="카카오 큰글씨 Regular"/>
-        <a:cs typeface="카카오 큰글씨 Regular"/>
-        <a:sym typeface="카카오 큰글씨 Regular"/>
+        <a:latin typeface="CorpSans 큰글씨 Regular"/>
+        <a:ea typeface="CorpSans 큰글씨 Regular"/>
+        <a:cs typeface="CorpSans 큰글씨 Regular"/>
+        <a:sym typeface="CorpSans 큰글씨 Regular"/>
       </a:defRPr>
     </a:lvl1pPr>
     <a:lvl2pPr marL="0" marR="0" indent="457200" algn="ctr" defTabSz="2438338" rtl="0" fontAlgn="auto" latinLnBrk="0" hangingPunct="0">
@@ -94,10 +94,10 @@
         </a:solidFill>
         <a:effectLst/>
         <a:uFillTx/>
-        <a:latin typeface="카카오 큰글씨 Regular"/>
-        <a:ea typeface="카카오 큰글씨 Regular"/>
-        <a:cs typeface="카카오 큰글씨 Regular"/>
-        <a:sym typeface="카카오 큰글씨 Regular"/>
+        <a:latin typeface="CorpSans 큰글씨 Regular"/>
+        <a:ea typeface="CorpSans 큰글씨 Regular"/>
+        <a:cs typeface="CorpSans 큰글씨 Regular"/>
+        <a:sym typeface="CorpSans 큰글씨 Regular"/>
       </a:defRPr>
     </a:lvl2pPr>
     <a:lvl3pPr marL="0" marR="0" indent="914400" algn="ctr" defTabSz="2438338" rtl="0" fontAlgn="auto" latinLnBrk="0" hangingPunct="0">
@@ -124,10 +124,10 @@
         </a:solidFill>
         <a:effectLst/>
         <a:uFillTx/>
-        <a:latin typeface="카카오 큰글씨 Regular"/>
-        <a:ea typeface="카카오 큰글씨 Regular"/>
-        <a:cs typeface="카카오 큰글씨 Regular"/>
-        <a:sym typeface="카카오 큰글씨 Regular"/>
+        <a:latin typeface="CorpSans 큰글씨 Regular"/>
+        <a:ea typeface="CorpSans 큰글씨 Regular"/>
+        <a:cs typeface="CorpSans 큰글씨 Regular"/>
+        <a:sym typeface="CorpSans 큰글씨 Regular"/>
       </a:defRPr>
     </a:lvl3pPr>
     <a:lvl4pPr marL="0" marR="0" indent="1371600" algn="ctr" defTabSz="2438338" rtl="0" fontAlgn="auto" latinLnBrk="0" hangingPunct="0">
@@ -154,10 +154,10 @@
         </a:solidFill>
         <a:effectLst/>
         <a:uFillTx/>
-        <a:latin typeface="카카오 큰글씨 Regular"/>
-        <a:ea typeface="카카오 큰글씨 Regular"/>
-        <a:cs typeface="카카오 큰글씨 Regular"/>
-        <a:sym typeface="카카오 큰글씨 Regular"/>
+        <a:latin typeface="CorpSans 큰글씨 Regular"/>
+        <a:ea typeface="CorpSans 큰글씨 Regular"/>
+        <a:cs typeface="CorpSans 큰글씨 Regular"/>
+        <a:sym typeface="CorpSans 큰글씨 Regular"/>
       </a:defRPr>
     </a:lvl4pPr>
     <a:lvl5pPr marL="0" marR="0" indent="1828800" algn="ctr" defTabSz="2438338" rtl="0" fontAlgn="auto" latinLnBrk="0" hangingPunct="0">
@@ -184,10 +184,10 @@
         </a:solidFill>
         <a:effectLst/>
         <a:uFillTx/>
-        <a:latin typeface="카카오 큰글씨 Regular"/>
-        <a:ea typeface="카카오 큰글씨 Regular"/>
-        <a:cs typeface="카카오 큰글씨 Regular"/>
-        <a:sym typeface="카카오 큰글씨 Regular"/>
+        <a:latin typeface="CorpSans 큰글씨 Regular"/>
+        <a:ea typeface="CorpSans 큰글씨 Regular"/>
+        <a:cs typeface="CorpSans 큰글씨 Regular"/>
+        <a:sym typeface="CorpSans 큰글씨 Regular"/>
       </a:defRPr>
     </a:lvl5pPr>
     <a:lvl6pPr marL="0" marR="0" indent="2286000" algn="ctr" defTabSz="2438338" rtl="0" fontAlgn="auto" latinLnBrk="0" hangingPunct="0">
@@ -214,10 +214,10 @@
         </a:solidFill>
         <a:effectLst/>
         <a:uFillTx/>
-        <a:latin typeface="카카오 큰글씨 Regular"/>
-        <a:ea typeface="카카오 큰글씨 Regular"/>
-        <a:cs typeface="카카오 큰글씨 Regular"/>
-        <a:sym typeface="카카오 큰글씨 Regular"/>
+        <a:latin typeface="CorpSans 큰글씨 Regular"/>
+        <a:ea typeface="CorpSans 큰글씨 Regular"/>
+        <a:cs typeface="CorpSans 큰글씨 Regular"/>
+        <a:sym typeface="CorpSans 큰글씨 Regular"/>
       </a:defRPr>
     </a:lvl6pPr>
     <a:lvl7pPr marL="0" marR="0" indent="2743200" algn="ctr" defTabSz="2438338" rtl="0" fontAlgn="auto" latinLnBrk="0" hangingPunct="0">
@@ -244,10 +244,10 @@
         </a:solidFill>
         <a:effectLst/>
         <a:uFillTx/>
-        <a:latin typeface="카카오 큰글씨 Regular"/>
-        <a:ea typeface="카카오 큰글씨 Regular"/>
-        <a:cs typeface="카카오 큰글씨 Regular"/>
-        <a:sym typeface="카카오 큰글씨 Regular"/>
+        <a:latin typeface="CorpSans 큰글씨 Regular"/>
+        <a:ea typeface="CorpSans 큰글씨 Regular"/>
+        <a:cs typeface="CorpSans 큰글씨 Regular"/>
+        <a:sym typeface="CorpSans 큰글씨 Regular"/>
       </a:defRPr>
     </a:lvl7pPr>
     <a:lvl8pPr marL="0" marR="0" indent="3200400" algn="ctr" defTabSz="2438338" rtl="0" fontAlgn="auto" latinLnBrk="0" hangingPunct="0">
@@ -274,10 +274,10 @@
         </a:solidFill>
         <a:effectLst/>
         <a:uFillTx/>
-        <a:latin typeface="카카오 큰글씨 Regular"/>
-        <a:ea typeface="카카오 큰글씨 Regular"/>
-        <a:cs typeface="카카오 큰글씨 Regular"/>
-        <a:sym typeface="카카오 큰글씨 Regular"/>
+        <a:latin typeface="CorpSans 큰글씨 Regular"/>
+        <a:ea typeface="CorpSans 큰글씨 Regular"/>
+        <a:cs typeface="CorpSans 큰글씨 Regular"/>
+        <a:sym typeface="CorpSans 큰글씨 Regular"/>
       </a:defRPr>
     </a:lvl8pPr>
     <a:lvl9pPr marL="0" marR="0" indent="3657600" algn="ctr" defTabSz="2438338" rtl="0" fontAlgn="auto" latinLnBrk="0" hangingPunct="0">
@@ -304,10 +304,10 @@
         </a:solidFill>
         <a:effectLst/>
         <a:uFillTx/>
-        <a:latin typeface="카카오 큰글씨 Regular"/>
-        <a:ea typeface="카카오 큰글씨 Regular"/>
-        <a:cs typeface="카카오 큰글씨 Regular"/>
-        <a:sym typeface="카카오 큰글씨 Regular"/>
+        <a:latin typeface="CorpSans 큰글씨 Regular"/>
+        <a:ea typeface="CorpSans 큰글씨 Regular"/>
+        <a:cs typeface="CorpSans 큰글씨 Regular"/>
+        <a:sym typeface="CorpSans 큰글씨 Regular"/>
       </a:defRPr>
     </a:lvl9pPr>
   </p:defaultTextStyle>
@@ -415,10 +415,10 @@
         <a:spcPct val="117999"/>
       </a:lnSpc>
       <a:defRPr sz="2200">
-        <a:latin typeface="카카오 큰글씨 Regular"/>
-        <a:ea typeface="카카오 큰글씨 Regular"/>
-        <a:cs typeface="카카오 큰글씨 Regular"/>
-        <a:sym typeface="카카오 큰글씨 Regular"/>
+        <a:latin typeface="CorpSans 큰글씨 Regular"/>
+        <a:ea typeface="CorpSans 큰글씨 Regular"/>
+        <a:cs typeface="CorpSans 큰글씨 Regular"/>
+        <a:sym typeface="CorpSans 큰글씨 Regular"/>
       </a:defRPr>
     </a:lvl1pPr>
     <a:lvl2pPr indent="228600" defTabSz="457200" latinLnBrk="0">
@@ -426,10 +426,10 @@
         <a:spcPct val="117999"/>
       </a:lnSpc>
       <a:defRPr sz="2200">
-        <a:latin typeface="카카오 큰글씨 Regular"/>
-        <a:ea typeface="카카오 큰글씨 Regular"/>
-        <a:cs typeface="카카오 큰글씨 Regular"/>
-        <a:sym typeface="카카오 큰글씨 Regular"/>
+        <a:latin typeface="CorpSans 큰글씨 Regular"/>
+        <a:ea typeface="CorpSans 큰글씨 Regular"/>
+        <a:cs typeface="CorpSans 큰글씨 Regular"/>
+        <a:sym typeface="CorpSans 큰글씨 Regular"/>
       </a:defRPr>
     </a:lvl2pPr>
     <a:lvl3pPr indent="457200" defTabSz="457200" latinLnBrk="0">
@@ -437,10 +437,10 @@
         <a:spcPct val="117999"/>
       </a:lnSpc>
       <a:defRPr sz="2200">
-        <a:latin typeface="카카오 큰글씨 Regular"/>
-        <a:ea typeface="카카오 큰글씨 Regular"/>
-        <a:cs typeface="카카오 큰글씨 Regular"/>
-        <a:sym typeface="카카오 큰글씨 Regular"/>
+        <a:latin typeface="CorpSans 큰글씨 Regular"/>
+        <a:ea typeface="CorpSans 큰글씨 Regular"/>
+        <a:cs typeface="CorpSans 큰글씨 Regular"/>
+        <a:sym typeface="CorpSans 큰글씨 Regular"/>
       </a:defRPr>
     </a:lvl3pPr>
     <a:lvl4pPr indent="685800" defTabSz="457200" latinLnBrk="0">
@@ -448,10 +448,10 @@
         <a:spcPct val="117999"/>
       </a:lnSpc>
       <a:defRPr sz="2200">
-        <a:latin typeface="카카오 큰글씨 Regular"/>
-        <a:ea typeface="카카오 큰글씨 Regular"/>
-        <a:cs typeface="카카오 큰글씨 Regular"/>
-        <a:sym typeface="카카오 큰글씨 Regular"/>
+        <a:latin typeface="CorpSans 큰글씨 Regular"/>
+        <a:ea typeface="CorpSans 큰글씨 Regular"/>
+        <a:cs typeface="CorpSans 큰글씨 Regular"/>
+        <a:sym typeface="CorpSans 큰글씨 Regular"/>
       </a:defRPr>
     </a:lvl4pPr>
     <a:lvl5pPr indent="914400" defTabSz="457200" latinLnBrk="0">
@@ -459,10 +459,10 @@
         <a:spcPct val="117999"/>
       </a:lnSpc>
       <a:defRPr sz="2200">
-        <a:latin typeface="카카오 큰글씨 Regular"/>
-        <a:ea typeface="카카오 큰글씨 Regular"/>
-        <a:cs typeface="카카오 큰글씨 Regular"/>
-        <a:sym typeface="카카오 큰글씨 Regular"/>
+        <a:latin typeface="CorpSans 큰글씨 Regular"/>
+        <a:ea typeface="CorpSans 큰글씨 Regular"/>
+        <a:cs typeface="CorpSans 큰글씨 Regular"/>
+        <a:sym typeface="CorpSans 큰글씨 Regular"/>
       </a:defRPr>
     </a:lvl5pPr>
     <a:lvl6pPr indent="1143000" defTabSz="457200" latinLnBrk="0">
@@ -470,10 +470,10 @@
         <a:spcPct val="117999"/>
       </a:lnSpc>
       <a:defRPr sz="2200">
-        <a:latin typeface="카카오 큰글씨 Regular"/>
-        <a:ea typeface="카카오 큰글씨 Regular"/>
-        <a:cs typeface="카카오 큰글씨 Regular"/>
-        <a:sym typeface="카카오 큰글씨 Regular"/>
+        <a:latin typeface="CorpSans 큰글씨 Regular"/>
+        <a:ea typeface="CorpSans 큰글씨 Regular"/>
+        <a:cs typeface="CorpSans 큰글씨 Regular"/>
+        <a:sym typeface="CorpSans 큰글씨 Regular"/>
       </a:defRPr>
     </a:lvl6pPr>
     <a:lvl7pPr indent="1371600" defTabSz="457200" latinLnBrk="0">
@@ -481,10 +481,10 @@
         <a:spcPct val="117999"/>
       </a:lnSpc>
       <a:defRPr sz="2200">
-        <a:latin typeface="카카오 큰글씨 Regular"/>
-        <a:ea typeface="카카오 큰글씨 Regular"/>
-        <a:cs typeface="카카오 큰글씨 Regular"/>
-        <a:sym typeface="카카오 큰글씨 Regular"/>
+        <a:latin typeface="CorpSans 큰글씨 Regular"/>
+        <a:ea typeface="CorpSans 큰글씨 Regular"/>
+        <a:cs typeface="CorpSans 큰글씨 Regular"/>
+        <a:sym typeface="CorpSans 큰글씨 Regular"/>
       </a:defRPr>
     </a:lvl7pPr>
     <a:lvl8pPr indent="1600200" defTabSz="457200" latinLnBrk="0">
@@ -492,10 +492,10 @@
         <a:spcPct val="117999"/>
       </a:lnSpc>
       <a:defRPr sz="2200">
-        <a:latin typeface="카카오 큰글씨 Regular"/>
-        <a:ea typeface="카카오 큰글씨 Regular"/>
-        <a:cs typeface="카카오 큰글씨 Regular"/>
-        <a:sym typeface="카카오 큰글씨 Regular"/>
+        <a:latin typeface="CorpSans 큰글씨 Regular"/>
+        <a:ea typeface="CorpSans 큰글씨 Regular"/>
+        <a:cs typeface="CorpSans 큰글씨 Regular"/>
+        <a:sym typeface="CorpSans 큰글씨 Regular"/>
       </a:defRPr>
     </a:lvl8pPr>
     <a:lvl9pPr indent="1828800" defTabSz="457200" latinLnBrk="0">
@@ -503,10 +503,10 @@
         <a:spcPct val="117999"/>
       </a:lnSpc>
       <a:defRPr sz="2200">
-        <a:latin typeface="카카오 큰글씨 Regular"/>
-        <a:ea typeface="카카오 큰글씨 Regular"/>
-        <a:cs typeface="카카오 큰글씨 Regular"/>
-        <a:sym typeface="카카오 큰글씨 Regular"/>
+        <a:latin typeface="CorpSans 큰글씨 Regular"/>
+        <a:ea typeface="CorpSans 큰글씨 Regular"/>
+        <a:cs typeface="CorpSans 큰글씨 Regular"/>
+        <a:sym typeface="CorpSans 큰글씨 Regular"/>
       </a:defRPr>
     </a:lvl9pPr>
   </p:notesStyle>
@@ -682,10 +682,10 @@
           <a:lstStyle>
             <a:lvl1pPr>
               <a:defRPr>
-                <a:latin typeface="카카오 큰글씨 Regular"/>
-                <a:ea typeface="카카오 큰글씨 Regular"/>
-                <a:cs typeface="카카오 큰글씨 Regular"/>
-                <a:sym typeface="카카오 큰글씨 Regular"/>
+                <a:latin typeface="CorpSans 큰글씨 Regular"/>
+                <a:ea typeface="CorpSans 큰글씨 Regular"/>
+                <a:cs typeface="CorpSans 큰글씨 Regular"/>
+                <a:sym typeface="CorpSans 큰글씨 Regular"/>
               </a:defRPr>
             </a:lvl1pPr>
           </a:lstStyle>
@@ -747,10 +747,10 @@
           <a:lstStyle>
             <a:lvl1pPr>
               <a:defRPr>
-                <a:latin typeface="카카오 큰글씨 Regular"/>
-                <a:ea typeface="카카오 큰글씨 Regular"/>
-                <a:cs typeface="카카오 큰글씨 Regular"/>
-                <a:sym typeface="카카오 큰글씨 Regular"/>
+                <a:latin typeface="CorpSans 큰글씨 Regular"/>
+                <a:ea typeface="CorpSans 큰글씨 Regular"/>
+                <a:cs typeface="CorpSans 큰글씨 Regular"/>
+                <a:sym typeface="CorpSans 큰글씨 Regular"/>
               </a:defRPr>
             </a:lvl1pPr>
           </a:lstStyle>
@@ -812,10 +812,10 @@
           <a:lstStyle>
             <a:lvl1pPr>
               <a:defRPr>
-                <a:latin typeface="카카오 큰글씨 Regular"/>
-                <a:ea typeface="카카오 큰글씨 Regular"/>
-                <a:cs typeface="카카오 큰글씨 Regular"/>
-                <a:sym typeface="카카오 큰글씨 Regular"/>
+                <a:latin typeface="CorpSans 큰글씨 Regular"/>
+                <a:ea typeface="CorpSans 큰글씨 Regular"/>
+                <a:cs typeface="CorpSans 큰글씨 Regular"/>
+                <a:sym typeface="CorpSans 큰글씨 Regular"/>
               </a:defRPr>
             </a:lvl1pPr>
           </a:lstStyle>
@@ -3316,14 +3316,14 @@
     </a:clrScheme>
     <a:fontScheme name="20_BasicBlack">
       <a:majorFont>
-        <a:latin typeface="카카오 큰글씨 Bold"/>
-        <a:ea typeface="카카오 큰글씨 Bold"/>
-        <a:cs typeface="카카오 큰글씨 Bold"/>
+        <a:latin typeface="CorpSans 큰글씨 Bold"/>
+        <a:ea typeface="CorpSans 큰글씨 Bold"/>
+        <a:cs typeface="CorpSans 큰글씨 Bold"/>
       </a:majorFont>
       <a:minorFont>
-        <a:latin typeface="카카오 큰글씨 Bold"/>
-        <a:ea typeface="카카오 큰글씨 Bold"/>
-        <a:cs typeface="카카오 큰글씨 Bold"/>
+        <a:latin typeface="CorpSans 큰글씨 Bold"/>
+        <a:ea typeface="CorpSans 큰글씨 Bold"/>
+        <a:cs typeface="CorpSans 큰글씨 Bold"/>
       </a:minorFont>
     </a:fontScheme>
     <a:fmtScheme name="20_BasicBlack">
@@ -3504,7 +3504,7 @@
             <a:latin typeface="+mn-lt"/>
             <a:ea typeface="+mn-ea"/>
             <a:cs typeface="+mn-cs"/>
-            <a:sym typeface="카카오 큰글씨 Bold"/>
+            <a:sym typeface="CorpSans 큰글씨 Bold"/>
           </a:defRPr>
         </a:defPPr>
         <a:lvl1pPr marL="0" marR="0" indent="0" algn="l" defTabSz="914400" rtl="0" fontAlgn="auto" latinLnBrk="1" hangingPunct="0">
@@ -4084,10 +4084,10 @@
             </a:solidFill>
             <a:effectLst/>
             <a:uFillTx/>
-            <a:latin typeface="카카오 큰글씨 Regular"/>
-            <a:ea typeface="카카오 큰글씨 Regular"/>
-            <a:cs typeface="카카오 큰글씨 Regular"/>
-            <a:sym typeface="카카오 큰글씨 Regular"/>
+            <a:latin typeface="CorpSans 큰글씨 Regular"/>
+            <a:ea typeface="CorpSans 큰글씨 Regular"/>
+            <a:cs typeface="CorpSans 큰글씨 Regular"/>
+            <a:sym typeface="CorpSans 큰글씨 Regular"/>
           </a:defRPr>
         </a:defPPr>
         <a:lvl1pPr marL="0" marR="0" indent="0" algn="l" defTabSz="914400" rtl="0" fontAlgn="auto" latinLnBrk="1" hangingPunct="0">
@@ -4386,14 +4386,14 @@
     </a:clrScheme>
     <a:fontScheme name="20_BasicBlack">
       <a:majorFont>
-        <a:latin typeface="카카오 큰글씨 Bold"/>
-        <a:ea typeface="카카오 큰글씨 Bold"/>
-        <a:cs typeface="카카오 큰글씨 Bold"/>
+        <a:latin typeface="CorpSans 큰글씨 Bold"/>
+        <a:ea typeface="CorpSans 큰글씨 Bold"/>
+        <a:cs typeface="CorpSans 큰글씨 Bold"/>
       </a:majorFont>
       <a:minorFont>
-        <a:latin typeface="카카오 큰글씨 Bold"/>
-        <a:ea typeface="카카오 큰글씨 Bold"/>
-        <a:cs typeface="카카오 큰글씨 Bold"/>
+        <a:latin typeface="CorpSans 큰글씨 Bold"/>
+        <a:ea typeface="CorpSans 큰글씨 Bold"/>
+        <a:cs typeface="CorpSans 큰글씨 Bold"/>
       </a:minorFont>
     </a:fontScheme>
     <a:fmtScheme name="20_BasicBlack">
@@ -4574,7 +4574,7 @@
             <a:latin typeface="+mn-lt"/>
             <a:ea typeface="+mn-ea"/>
             <a:cs typeface="+mn-cs"/>
-            <a:sym typeface="카카오 큰글씨 Bold"/>
+            <a:sym typeface="CorpSans 큰글씨 Bold"/>
           </a:defRPr>
         </a:defPPr>
         <a:lvl1pPr marL="0" marR="0" indent="0" algn="l" defTabSz="914400" rtl="0" fontAlgn="auto" latinLnBrk="1" hangingPunct="0">
@@ -5154,10 +5154,10 @@
             </a:solidFill>
             <a:effectLst/>
             <a:uFillTx/>
-            <a:latin typeface="카카오 큰글씨 Regular"/>
-            <a:ea typeface="카카오 큰글씨 Regular"/>
-            <a:cs typeface="카카오 큰글씨 Regular"/>
-            <a:sym typeface="카카오 큰글씨 Regular"/>
+            <a:latin typeface="CorpSans 큰글씨 Regular"/>
+            <a:ea typeface="CorpSans 큰글씨 Regular"/>
+            <a:cs typeface="CorpSans 큰글씨 Regular"/>
+            <a:sym typeface="CorpSans 큰글씨 Regular"/>
           </a:defRPr>
         </a:defPPr>
         <a:lvl1pPr marL="0" marR="0" indent="0" algn="l" defTabSz="914400" rtl="0" fontAlgn="auto" latinLnBrk="1" hangingPunct="0">
